--- a/作品海报_20261020.pptx
+++ b/作品海报_20261020.pptx
@@ -3409,78 +3409,26 @@
           </a:bodyPr>
           <a:lstStyle/>
           <a:p>
-            <a:pPr>
-              <a:spcBef>
-                <a:spcPts val="0"/>
-              </a:spcBef>
-              <a:spcAft>
-                <a:spcPts val="200"/>
-              </a:spcAft>
-            </a:pPr>
-            <a:r>
-              <a:rPr sz="1100" b="0">
-                <a:solidFill>
-                  <a:srgbClr val="444444"/>
-                </a:solidFill>
-                <a:latin typeface="微软雅黑"/>
-              </a:rPr>
+            <a:r>
+              <a:rPr sz="1100"/>
               <a:t>① 视频输入：SC500CS RAW10 2-lane → MIPI D-PHY RX → CSI 解包 → RAW10 解包</a:t>
             </a:r>
           </a:p>
           <a:p>
-            <a:pPr>
-              <a:spcBef>
-                <a:spcPts val="0"/>
-              </a:spcBef>
-              <a:spcAft>
-                <a:spcPts val="200"/>
-              </a:spcAft>
-            </a:pPr>
-            <a:r>
-              <a:rPr sz="1100" b="0">
-                <a:solidFill>
-                  <a:srgbClr val="444444"/>
-                </a:solidFill>
-                <a:latin typeface="微软雅黑"/>
-              </a:rPr>
+            <a:r>
+              <a:rPr sz="1100"/>
               <a:t>② 图像处理（ISP 域 60 MHz，每拍 4 像素，AXI4-Stream 逐拍握手）：demosaic → 128→96bit → 镜头暗角校正 → 自动白平衡 → 真 S 色调曲线 → 五模式风格化 → 96→128bit</a:t>
             </a:r>
           </a:p>
           <a:p>
-            <a:pPr>
-              <a:spcBef>
-                <a:spcPts val="0"/>
-              </a:spcBef>
-              <a:spcAft>
-                <a:spcPts val="200"/>
-              </a:spcAft>
-            </a:pPr>
-            <a:r>
-              <a:rPr sz="1100" b="0">
-                <a:solidFill>
-                  <a:srgbClr val="444444"/>
-                </a:solidFill>
-                <a:latin typeface="微软雅黑"/>
-              </a:rPr>
-              <a:t>③ 显示：DDR2 帧缓存 → uivtc(720p60) → 7 层 OSD 叠加 → HDMI 1.4b</a:t>
-            </a:r>
-          </a:p>
-          <a:p>
-            <a:pPr>
-              <a:spcBef>
-                <a:spcPts val="0"/>
-              </a:spcBef>
-              <a:spcAft>
-                <a:spcPts val="0"/>
-              </a:spcAft>
-            </a:pPr>
-            <a:r>
-              <a:rPr sz="1100" b="0">
-                <a:solidFill>
-                  <a:srgbClr val="444444"/>
-                </a:solidFill>
-                <a:latin typeface="微软雅黑"/>
-              </a:rPr>
+            <a:r>
+              <a:rPr sz="1100"/>
+              <a:t>③ 显示：DDR2 帧缓存 → uivtc(720p60) → 8 层 OSD 叠加 → HDMI 1.4b</a:t>
+            </a:r>
+          </a:p>
+          <a:p>
+            <a:r>
+              <a:rPr sz="1100"/>
               <a:t>④ 控制（24 MHz 域）：按键去抖 → 模式选择；AE 闭环状态机 → 经 I2C 写传感器；拨码同步 → 各模块使能</a:t>
             </a:r>
           </a:p>
@@ -3680,22 +3628,9 @@
           </a:bodyPr>
           <a:lstStyle/>
           <a:p>
-            <a:pPr>
-              <a:spcBef>
-                <a:spcPts val="0"/>
-              </a:spcBef>
-              <a:spcAft>
-                <a:spcPts val="0"/>
-              </a:spcAft>
-            </a:pPr>
-            <a:r>
-              <a:rPr sz="1100" b="0">
-                <a:solidFill>
-                  <a:srgbClr val="444444"/>
-                </a:solidFill>
-                <a:latin typeface="微软雅黑"/>
-              </a:rPr>
-              <a:t>用「白纸靶面 + 带标记物旋转 180°」对照实验，把偏色定位到镜头本身而非白平衡；自行拟合 20×12 二维增益表 + 双线性插值，逐列 R/G 极差下降 43~46%（四次独立复测一致）。</a:t>
+            <a:r>
+              <a:rPr sz="1100"/>
+              <a:t>本来是当白平衡在查。后来铺满白纸、在纸上放个标记物、把相机原地转 180° 再拍一张——暗角跟着画面走、不跟着场景走，这才确认是镜头本身。表是自己拟合的，20×12 个节点，逐列 R/G 极差降了 43~46%，四次独立复测都对得上。</a:t>
             </a:r>
           </a:p>
         </p:txBody>
@@ -3808,22 +3743,9 @@
           </a:bodyPr>
           <a:lstStyle/>
           <a:p>
-            <a:pPr>
-              <a:spcBef>
-                <a:spcPts val="0"/>
-              </a:spcBef>
-              <a:spcAft>
-                <a:spcPts val="0"/>
-              </a:spcAft>
-            </a:pPr>
-            <a:r>
-              <a:rPr sz="1100" b="0">
-                <a:solidFill>
-                  <a:srgbClr val="444444"/>
-                </a:solidFill>
-                <a:latin typeface="微软雅黑"/>
-              </a:rPr>
-              <a:t>灰世界 + 倒数查表替代除法器（省 1 700 余 LUT）；发现并修复「增益帧内爬坡」这一真因——增益每拍被部分和改写，导致帧内色偏；改为帧锁存后帧平均校正量第一次达到 0.985/0.983。</a:t>
+            <a:r>
+              <a:rPr sz="1100"/>
+              <a:t>门级仿真一路查下来才发现：增益每拍都被运行中的部分和改写，整帧是条爬坡线，所以帧平均校正量一直偏低。改成在帧起始那一拍锁存成常量之后，白平衡第一次做到 R/G 0.985、B/G 0.983。顺手把那两路 IP 生成的流水除法器换成倒数查表，省下 1700 多个 LUT。</a:t>
             </a:r>
           </a:p>
         </p:txBody>
@@ -3936,22 +3858,9 @@
           </a:bodyPr>
           <a:lstStyle/>
           <a:p>
-            <a:pPr>
-              <a:spcBef>
-                <a:spcPts val="0"/>
-              </a:spcBef>
-              <a:spcAft>
-                <a:spcPts val="0"/>
-              </a:spcAft>
-            </a:pPr>
-            <a:r>
-              <a:rPr sz="1100" b="0">
-                <a:solidFill>
-                  <a:srgbClr val="444444"/>
-                </a:solidFill>
-                <a:latin typeface="微软雅黑"/>
-              </a:rPr>
-              <a:t>60 MHz 域纯移位加法做帧亮度与高光/暗部统计（零 DSP），24 MHz 域闭环写传感器曝光与模拟增益；模拟增益按 {0x03,0x07,0x0F,0x1F}×0x20~0x3F 两级编码，覆盖 1.000×~15.750×。</a:t>
+            <a:r>
+              <a:rPr sz="1100"/>
+              <a:t>60MHz 域只用移位加法统计帧亮度和高光、暗部像素，零 DSP；24MHz 域闭环把曝光和模拟增益写回传感器。曝光已经顶到手册上限（2×VTS−10），720p60 下唯一还能连续调的杠杆就剩模拟增益了。</a:t>
             </a:r>
           </a:p>
         </p:txBody>
@@ -4064,22 +3973,9 @@
           </a:bodyPr>
           <a:lstStyle/>
           <a:p>
-            <a:pPr>
-              <a:spcBef>
-                <a:spcPts val="0"/>
-              </a:spcBef>
-              <a:spcAft>
-                <a:spcPts val="0"/>
-              </a:spcAft>
-            </a:pPr>
-            <a:r>
-              <a:rPr sz="1100" b="0">
-                <a:solidFill>
-                  <a:srgbClr val="444444"/>
-                </a:solidFill>
-                <a:latin typeface="微软雅黑"/>
-              </a:rPr>
-              <a:t>运动检测：16×9 块级帧差，只存 144 字节块均值，无帧缓存。目标检测：同分辨率颜色分块，两帧确认 + 孤立块滤除 + 帧级保持——空场景零误检，目标出现即紧贴描边。</a:t>
+            <a:r>
+              <a:rPr sz="860"/>
+              <a:t>运动检测是块级帧差：跨帧只存 144 个 80×80 块的均值，共 144 字节，不存整帧。目标检测按颜色分块，另加孤立块滤除和 1 秒保持——空场景不出框，目标一进画面就贴边描框。</a:t>
             </a:r>
           </a:p>
         </p:txBody>
@@ -5430,98 +5326,33 @@
           </a:bodyPr>
           <a:lstStyle/>
           <a:p>
-            <a:pPr>
-              <a:spcBef>
-                <a:spcPts val="0"/>
-              </a:spcBef>
-              <a:spcAft>
-                <a:spcPts val="200"/>
-              </a:spcAft>
-            </a:pPr>
-            <a:r>
-              <a:rPr sz="1200" b="0">
-                <a:solidFill>
-                  <a:srgbClr val="444444"/>
-                </a:solidFill>
-                <a:latin typeface="微软雅黑"/>
-              </a:rPr>
+            <a:r>
+              <a:rPr sz="1200"/>
               <a:t>SW1 暗角校正 · SW2 S 曲线</a:t>
             </a:r>
           </a:p>
           <a:p>
-            <a:pPr>
-              <a:spcBef>
-                <a:spcPts val="0"/>
-              </a:spcBef>
-              <a:spcAft>
-                <a:spcPts val="200"/>
-              </a:spcAft>
-            </a:pPr>
-            <a:r>
-              <a:rPr sz="1200" b="0">
-                <a:solidFill>
-                  <a:srgbClr val="444444"/>
-                </a:solidFill>
-                <a:latin typeface="微软雅黑"/>
-              </a:rPr>
+            <a:r>
+              <a:rPr sz="1200"/>
               <a:t>SW3 目标检测 · SW4 检测灵敏度</a:t>
             </a:r>
           </a:p>
           <a:p>
-            <a:pPr>
-              <a:spcBef>
-                <a:spcPts val="0"/>
-              </a:spcBef>
-              <a:spcAft>
-                <a:spcPts val="200"/>
-              </a:spcAft>
-            </a:pPr>
-            <a:r>
-              <a:rPr sz="1200" b="0">
-                <a:solidFill>
-                  <a:srgbClr val="444444"/>
-                </a:solidFill>
-                <a:latin typeface="微软雅黑"/>
-              </a:rPr>
+            <a:r>
+              <a:rPr sz="1200"/>
               <a:t>K1 直通 · K2 灰度 · K3 伪彩 · K4 卡通化</a:t>
             </a:r>
           </a:p>
           <a:p>
-            <a:pPr>
-              <a:spcBef>
-                <a:spcPts val="0"/>
-              </a:spcBef>
-              <a:spcAft>
-                <a:spcPts val="200"/>
-              </a:spcAft>
-            </a:pPr>
-            <a:r>
-              <a:rPr sz="1200" b="0">
-                <a:solidFill>
-                  <a:srgbClr val="444444"/>
-                </a:solidFill>
-                <a:latin typeface="微软雅黑"/>
-              </a:rPr>
+            <a:r>
+              <a:rPr sz="1200"/>
               <a:t>长按任一键 ≥1 s = 五段彩条</a:t>
             </a:r>
           </a:p>
           <a:p>
-            <a:pPr>
-              <a:spcBef>
-                <a:spcPts val="0"/>
-              </a:spcBef>
-              <a:spcAft>
-                <a:spcPts val="0"/>
-              </a:spcAft>
-            </a:pPr>
-            <a:r>
-              <a:rPr sz="1200" b="1">
-                <a:solidFill>
-                  <a:srgbClr val="1B6B3A"/>
-                </a:solidFill>
-                <a:latin typeface="微软雅黑"/>
-              </a:rPr>
-              <a:t>画面实时显示 7 层 OSD 与两行遥测</a:t>
+            <a:r>
+              <a:rPr sz="1200"/>
+              <a:t>画面实时显示 8 层 OSD 与两行遥测</a:t>
             </a:r>
           </a:p>
         </p:txBody>
@@ -5592,22 +5423,9 @@
           </a:bodyPr>
           <a:lstStyle/>
           <a:p>
-            <a:pPr>
-              <a:spcBef>
-                <a:spcPts val="0"/>
-              </a:spcBef>
-              <a:spcAft>
-                <a:spcPts val="0"/>
-              </a:spcAft>
-            </a:pPr>
-            <a:r>
-              <a:rPr sz="1300" b="0">
-                <a:solidFill>
-                  <a:srgbClr val="BFD4EA"/>
-                </a:solidFill>
-                <a:latin typeface="微软雅黑"/>
-              </a:rPr>
-              <a:t>全部图像处理算法与控制逻辑均在 FPGA 内以流水线方式自主实现，不含任何额外处理器</a:t>
+            <a:r>
+              <a:rPr sz="1300"/>
+              <a:t>算法和控制逻辑全部写在 FPGA 里，没有挂任何处理器</a:t>
             </a:r>
           </a:p>
         </p:txBody>
